--- a/ai-ppt-batch8-raghavjoshi-raghavjoshi200314@gmail.com.pptx
+++ b/ai-ppt-batch8-raghavjoshi-raghavjoshi200314@gmail.com.pptx
@@ -13,8 +13,9 @@
     <p:sldId id="262" r:id="rId7"/>
     <p:sldId id="261" r:id="rId8"/>
     <p:sldId id="264" r:id="rId9"/>
-    <p:sldId id="265" r:id="rId10"/>
-    <p:sldId id="263" r:id="rId11"/>
+    <p:sldId id="266" r:id="rId10"/>
+    <p:sldId id="265" r:id="rId11"/>
+    <p:sldId id="263" r:id="rId12"/>
   </p:sldIdLst>
   <p:sldSz cx="12192000" cy="6858000"/>
   <p:notesSz cx="6858000" cy="9144000"/>
@@ -119,7 +120,7 @@
 <file path=ppt/revisionInfo.xml><?xml version="1.0" encoding="utf-8"?>
 <p1510:revInfo xmlns:a="http://schemas.openxmlformats.org/drawingml/2006/main" xmlns:r="http://schemas.openxmlformats.org/officeDocument/2006/relationships" xmlns:p1510="http://schemas.microsoft.com/office/powerpoint/2015/10/main">
   <p1510:revLst>
-    <p1510:client id="{5CE18DA3-6962-4DD8-AA14-B7DFCF500C6A}" v="673" dt="2026-03-12T12:25:06.218"/>
+    <p1510:client id="{B581BE68-BD36-4A9E-B1DB-9F1D730D53E8}" v="3" dt="2026-03-12T13:38:12.412"/>
   </p1510:revLst>
 </p1510:revInfo>
 </file>
@@ -3542,6 +3543,174 @@
         <a:gradFill flip="none" rotWithShape="1">
           <a:gsLst>
             <a:gs pos="0">
+              <a:schemeClr val="accent1">
+                <a:lumMod val="5000"/>
+                <a:lumOff val="95000"/>
+              </a:schemeClr>
+            </a:gs>
+            <a:gs pos="74000">
+              <a:schemeClr val="accent1">
+                <a:lumMod val="45000"/>
+                <a:lumOff val="55000"/>
+              </a:schemeClr>
+            </a:gs>
+            <a:gs pos="83000">
+              <a:schemeClr val="accent1">
+                <a:lumMod val="45000"/>
+                <a:lumOff val="55000"/>
+              </a:schemeClr>
+            </a:gs>
+            <a:gs pos="100000">
+              <a:schemeClr val="accent1">
+                <a:lumMod val="30000"/>
+                <a:lumOff val="70000"/>
+              </a:schemeClr>
+            </a:gs>
+          </a:gsLst>
+          <a:lin ang="5400000" scaled="1"/>
+          <a:tileRect/>
+        </a:gradFill>
+        <a:effectLst/>
+      </p:bgPr>
+    </p:bg>
+    <p:spTree>
+      <p:nvGrpSpPr>
+        <p:cNvPr id="1" name=""/>
+        <p:cNvGrpSpPr/>
+        <p:nvPr/>
+      </p:nvGrpSpPr>
+      <p:grpSpPr>
+        <a:xfrm>
+          <a:off x="0" y="0"/>
+          <a:ext cx="0" cy="0"/>
+          <a:chOff x="0" y="0"/>
+          <a:chExt cx="0" cy="0"/>
+        </a:xfrm>
+      </p:grpSpPr>
+      <p:sp>
+        <p:nvSpPr>
+          <p:cNvPr id="2" name="Title 1">
+            <a:extLst>
+              <a:ext uri="{FF2B5EF4-FFF2-40B4-BE49-F238E27FC236}">
+                <a16:creationId xmlns:a16="http://schemas.microsoft.com/office/drawing/2014/main" id="{5858941A-226A-16AC-5095-AA6EE1E1BF58}"/>
+              </a:ext>
+            </a:extLst>
+          </p:cNvPr>
+          <p:cNvSpPr>
+            <a:spLocks noGrp="1"/>
+          </p:cNvSpPr>
+          <p:nvPr>
+            <p:ph type="title"/>
+          </p:nvPr>
+        </p:nvSpPr>
+        <p:spPr/>
+        <p:txBody>
+          <a:bodyPr>
+            <a:normAutofit/>
+          </a:bodyPr>
+          <a:lstStyle/>
+          <a:p>
+            <a:r>
+              <a:rPr lang="en-US" sz="6000" b="1" dirty="0">
+                <a:latin typeface="Arial Black" panose="020B0A04020102020204" pitchFamily="34" charset="0"/>
+              </a:rPr>
+              <a:t>Conclusion</a:t>
+            </a:r>
+          </a:p>
+        </p:txBody>
+      </p:sp>
+      <p:sp>
+        <p:nvSpPr>
+          <p:cNvPr id="3" name="Content Placeholder 2">
+            <a:extLst>
+              <a:ext uri="{FF2B5EF4-FFF2-40B4-BE49-F238E27FC236}">
+                <a16:creationId xmlns:a16="http://schemas.microsoft.com/office/drawing/2014/main" id="{9DA73E89-7C4C-6A45-493C-D37264163A34}"/>
+              </a:ext>
+            </a:extLst>
+          </p:cNvPr>
+          <p:cNvSpPr>
+            <a:spLocks noGrp="1"/>
+          </p:cNvSpPr>
+          <p:nvPr>
+            <p:ph idx="1"/>
+          </p:nvPr>
+        </p:nvSpPr>
+        <p:spPr/>
+        <p:txBody>
+          <a:bodyPr>
+            <a:normAutofit/>
+          </a:bodyPr>
+          <a:lstStyle/>
+          <a:p>
+            <a:r>
+              <a:rPr lang="en-US" sz="3600" dirty="0">
+                <a:latin typeface="Arial" panose="020B0604020202020204" pitchFamily="34" charset="0"/>
+                <a:cs typeface="Arial" panose="020B0604020202020204" pitchFamily="34" charset="0"/>
+              </a:rPr>
+              <a:t>CNN can effectively classify lung CT scan images.</a:t>
+            </a:r>
+          </a:p>
+          <a:p>
+            <a:r>
+              <a:rPr lang="en-US" sz="3600" dirty="0">
+                <a:latin typeface="Arial" panose="020B0604020202020204" pitchFamily="34" charset="0"/>
+                <a:cs typeface="Arial" panose="020B0604020202020204" pitchFamily="34" charset="0"/>
+              </a:rPr>
+              <a:t>The </a:t>
+            </a:r>
+            <a:r>
+              <a:rPr lang="en-US" sz="3600" dirty="0" err="1">
+                <a:latin typeface="Arial" panose="020B0604020202020204" pitchFamily="34" charset="0"/>
+                <a:cs typeface="Arial" panose="020B0604020202020204" pitchFamily="34" charset="0"/>
+              </a:rPr>
+              <a:t>Streamlit</a:t>
+            </a:r>
+            <a:r>
+              <a:rPr lang="en-US" sz="3600" dirty="0">
+                <a:latin typeface="Arial" panose="020B0604020202020204" pitchFamily="34" charset="0"/>
+                <a:cs typeface="Arial" panose="020B0604020202020204" pitchFamily="34" charset="0"/>
+              </a:rPr>
+              <a:t> app gives an easy to use interface with real‑time predictions.</a:t>
+            </a:r>
+          </a:p>
+          <a:p>
+            <a:r>
+              <a:rPr lang="en-US" sz="3600" dirty="0">
+                <a:latin typeface="Arial" panose="020B0604020202020204" pitchFamily="34" charset="0"/>
+                <a:cs typeface="Arial" panose="020B0604020202020204" pitchFamily="34" charset="0"/>
+              </a:rPr>
+              <a:t>Future work: larger datasets can be used with improved architectures.</a:t>
+            </a:r>
+          </a:p>
+          <a:p>
+            <a:endParaRPr lang="en-US" sz="3600" dirty="0">
+              <a:latin typeface="Arial" panose="020B0604020202020204" pitchFamily="34" charset="0"/>
+              <a:cs typeface="Arial" panose="020B0604020202020204" pitchFamily="34" charset="0"/>
+            </a:endParaRPr>
+          </a:p>
+        </p:txBody>
+      </p:sp>
+    </p:spTree>
+    <p:extLst>
+      <p:ext uri="{BB962C8B-B14F-4D97-AF65-F5344CB8AC3E}">
+        <p14:creationId xmlns:p14="http://schemas.microsoft.com/office/powerpoint/2010/main" val="2753395072"/>
+      </p:ext>
+    </p:extLst>
+  </p:cSld>
+  <p:clrMapOvr>
+    <a:masterClrMapping/>
+  </p:clrMapOvr>
+</p:sld>
+</file>
+
+<file path=ppt/slides/slide11.xml><?xml version="1.0" encoding="utf-8"?>
+<p:sld xmlns:a="http://schemas.openxmlformats.org/drawingml/2006/main" xmlns:r="http://schemas.openxmlformats.org/officeDocument/2006/relationships" xmlns:p="http://schemas.openxmlformats.org/presentationml/2006/main">
+  <p:cSld>
+    <p:bg>
+      <p:bgPr>
+        <a:gradFill flip="none" rotWithShape="1">
+          <a:gsLst>
+            <a:gs pos="0">
               <a:schemeClr val="accent6">
                 <a:lumMod val="5000"/>
                 <a:lumOff val="95000"/>
@@ -3756,7 +3925,6 @@
           </a:bodyPr>
           <a:lstStyle/>
           <a:p>
-            <a:pPr algn="ctr"/>
             <a:r>
               <a:rPr lang="en-US" sz="6000" b="1" dirty="0">
                 <a:latin typeface="Arial Black" panose="020B0A04020102020204" pitchFamily="34" charset="0"/>
@@ -3885,7 +4053,6 @@
           </a:bodyPr>
           <a:lstStyle/>
           <a:p>
-            <a:pPr algn="ctr"/>
             <a:r>
               <a:rPr lang="en-US" sz="6000" b="1" dirty="0">
                 <a:latin typeface="Arial Black" panose="020B0A04020102020204" pitchFamily="34" charset="0"/>
@@ -4025,7 +4192,6 @@
           </a:bodyPr>
           <a:lstStyle/>
           <a:p>
-            <a:pPr algn="ctr"/>
             <a:r>
               <a:rPr lang="en-US" sz="6000" b="1" dirty="0">
                 <a:latin typeface="Arial Black" panose="020B0A04020102020204" pitchFamily="34" charset="0"/>
@@ -4075,7 +4241,7 @@
                 <a:latin typeface="Arial" panose="020B0604020202020204" pitchFamily="34" charset="0"/>
                 <a:cs typeface="Arial" panose="020B0604020202020204" pitchFamily="34" charset="0"/>
               </a:rPr>
-              <a:t> Resized images to 224 × 224, to reduce size.</a:t>
+              <a:t> Resized images to 224 × 224 pixels, to reduce size.</a:t>
             </a:r>
           </a:p>
           <a:p>
@@ -4084,7 +4250,7 @@
                 <a:latin typeface="Arial" panose="020B0604020202020204" pitchFamily="34" charset="0"/>
                 <a:cs typeface="Arial" panose="020B0604020202020204" pitchFamily="34" charset="0"/>
               </a:rPr>
-              <a:t>Normalize pixel values to 0‑1 by dividing each image by 255 pixels.</a:t>
+              <a:t>Normalize pixel values to 0‑1 by dividing by 255 pixels, which helps the neural network train more efficiently.</a:t>
             </a:r>
           </a:p>
           <a:p>
@@ -4262,7 +4428,7 @@
                 <a:latin typeface="Arial" panose="020B0604020202020204" pitchFamily="34" charset="0"/>
                 <a:cs typeface="Arial" panose="020B0604020202020204" pitchFamily="34" charset="0"/>
               </a:rPr>
-              <a:t> layer – this layer converts output to probability</a:t>
+              <a:t> layer – this layer converts output into probability for each class</a:t>
             </a:r>
           </a:p>
           <a:p>
@@ -4421,7 +4587,7 @@
                 <a:latin typeface="Arial" panose="020B0604020202020204" pitchFamily="34" charset="0"/>
                 <a:cs typeface="Arial" panose="020B0604020202020204" pitchFamily="34" charset="0"/>
               </a:rPr>
-              <a:t>Optimizer used: Adam</a:t>
+              <a:t>Optimizer used: Adam </a:t>
             </a:r>
           </a:p>
           <a:p>
@@ -4717,7 +4883,6 @@
           </a:bodyPr>
           <a:lstStyle/>
           <a:p>
-            <a:pPr algn="ctr"/>
             <a:r>
               <a:rPr lang="en-US" sz="6000" b="1" dirty="0">
                 <a:latin typeface="Arial Black" panose="020B0A04020102020204" pitchFamily="34" charset="0"/>
@@ -4839,41 +5004,6 @@
 <file path=ppt/slides/slide9.xml><?xml version="1.0" encoding="utf-8"?>
 <p:sld xmlns:a="http://schemas.openxmlformats.org/drawingml/2006/main" xmlns:r="http://schemas.openxmlformats.org/officeDocument/2006/relationships" xmlns:p="http://schemas.openxmlformats.org/presentationml/2006/main">
   <p:cSld>
-    <p:bg>
-      <p:bgPr>
-        <a:gradFill flip="none" rotWithShape="1">
-          <a:gsLst>
-            <a:gs pos="0">
-              <a:schemeClr val="accent1">
-                <a:lumMod val="5000"/>
-                <a:lumOff val="95000"/>
-              </a:schemeClr>
-            </a:gs>
-            <a:gs pos="74000">
-              <a:schemeClr val="accent1">
-                <a:lumMod val="45000"/>
-                <a:lumOff val="55000"/>
-              </a:schemeClr>
-            </a:gs>
-            <a:gs pos="83000">
-              <a:schemeClr val="accent1">
-                <a:lumMod val="45000"/>
-                <a:lumOff val="55000"/>
-              </a:schemeClr>
-            </a:gs>
-            <a:gs pos="100000">
-              <a:schemeClr val="accent1">
-                <a:lumMod val="30000"/>
-                <a:lumOff val="70000"/>
-              </a:schemeClr>
-            </a:gs>
-          </a:gsLst>
-          <a:lin ang="5400000" scaled="1"/>
-          <a:tileRect/>
-        </a:gradFill>
-        <a:effectLst/>
-      </p:bgPr>
-    </p:bg>
     <p:spTree>
       <p:nvGrpSpPr>
         <p:cNvPr id="1" name=""/>
@@ -4888,113 +5018,157 @@
           <a:chExt cx="0" cy="0"/>
         </a:xfrm>
       </p:grpSpPr>
-      <p:sp>
-        <p:nvSpPr>
-          <p:cNvPr id="2" name="Title 1">
-            <a:extLst>
-              <a:ext uri="{FF2B5EF4-FFF2-40B4-BE49-F238E27FC236}">
-                <a16:creationId xmlns:a16="http://schemas.microsoft.com/office/drawing/2014/main" id="{5858941A-226A-16AC-5095-AA6EE1E1BF58}"/>
-              </a:ext>
-            </a:extLst>
-          </p:cNvPr>
-          <p:cNvSpPr>
-            <a:spLocks noGrp="1"/>
-          </p:cNvSpPr>
-          <p:nvPr>
-            <p:ph type="title"/>
-          </p:nvPr>
-        </p:nvSpPr>
-        <p:spPr/>
-        <p:txBody>
-          <a:bodyPr>
-            <a:normAutofit/>
+      <p:pic>
+        <p:nvPicPr>
+          <p:cNvPr id="7" name="Picture 6">
+            <a:extLst>
+              <a:ext uri="{FF2B5EF4-FFF2-40B4-BE49-F238E27FC236}">
+                <a16:creationId xmlns:a16="http://schemas.microsoft.com/office/drawing/2014/main" id="{568B9D8F-2670-30A0-3A5C-7EFDFDB7F7CB}"/>
+              </a:ext>
+            </a:extLst>
+          </p:cNvPr>
+          <p:cNvPicPr>
+            <a:picLocks noChangeAspect="1"/>
+          </p:cNvPicPr>
+          <p:nvPr/>
+        </p:nvPicPr>
+        <p:blipFill>
+          <a:blip r:embed="rId2">
+            <a:extLst>
+              <a:ext uri="{28A0092B-C50C-407E-A947-70E740481C1C}">
+                <a14:useLocalDpi xmlns:a14="http://schemas.microsoft.com/office/drawing/2010/main" val="0"/>
+              </a:ext>
+            </a:extLst>
+          </a:blip>
+          <a:stretch>
+            <a:fillRect/>
+          </a:stretch>
+        </p:blipFill>
+        <p:spPr>
+          <a:xfrm>
+            <a:off x="730000" y="1258529"/>
+            <a:ext cx="5057893" cy="2485101"/>
+          </a:xfrm>
+          <a:prstGeom prst="rect">
+            <a:avLst/>
+          </a:prstGeom>
+        </p:spPr>
+      </p:pic>
+      <p:pic>
+        <p:nvPicPr>
+          <p:cNvPr id="5" name="Content Placeholder 4">
+            <a:extLst>
+              <a:ext uri="{FF2B5EF4-FFF2-40B4-BE49-F238E27FC236}">
+                <a16:creationId xmlns:a16="http://schemas.microsoft.com/office/drawing/2014/main" id="{077EE6F7-3D62-710A-4794-B053791DBB8B}"/>
+              </a:ext>
+            </a:extLst>
+          </p:cNvPr>
+          <p:cNvPicPr>
+            <a:picLocks noGrp="1" noChangeAspect="1"/>
+          </p:cNvPicPr>
+          <p:nvPr>
+            <p:ph idx="1"/>
+          </p:nvPr>
+        </p:nvPicPr>
+        <p:blipFill>
+          <a:blip r:embed="rId3"/>
+          <a:stretch>
+            <a:fillRect/>
+          </a:stretch>
+        </p:blipFill>
+        <p:spPr>
+          <a:xfrm>
+            <a:off x="6282812" y="1742765"/>
+            <a:ext cx="5343027" cy="4001729"/>
+          </a:xfrm>
+          <a:prstGeom prst="rect">
+            <a:avLst/>
+          </a:prstGeom>
+        </p:spPr>
+      </p:pic>
+      <p:pic>
+        <p:nvPicPr>
+          <p:cNvPr id="9" name="Picture 8">
+            <a:extLst>
+              <a:ext uri="{FF2B5EF4-FFF2-40B4-BE49-F238E27FC236}">
+                <a16:creationId xmlns:a16="http://schemas.microsoft.com/office/drawing/2014/main" id="{72BDBF08-9905-C60F-6073-DA6E374D8797}"/>
+              </a:ext>
+            </a:extLst>
+          </p:cNvPr>
+          <p:cNvPicPr>
+            <a:picLocks noChangeAspect="1"/>
+          </p:cNvPicPr>
+          <p:nvPr/>
+        </p:nvPicPr>
+        <p:blipFill>
+          <a:blip r:embed="rId4">
+            <a:extLst>
+              <a:ext uri="{28A0092B-C50C-407E-A947-70E740481C1C}">
+                <a14:useLocalDpi xmlns:a14="http://schemas.microsoft.com/office/drawing/2010/main" val="0"/>
+              </a:ext>
+            </a:extLst>
+          </a:blip>
+          <a:stretch>
+            <a:fillRect/>
+          </a:stretch>
+        </p:blipFill>
+        <p:spPr>
+          <a:xfrm>
+            <a:off x="730000" y="3920613"/>
+            <a:ext cx="5080866" cy="2679289"/>
+          </a:xfrm>
+          <a:prstGeom prst="rect">
+            <a:avLst/>
+          </a:prstGeom>
+        </p:spPr>
+      </p:pic>
+      <p:sp>
+        <p:nvSpPr>
+          <p:cNvPr id="10" name="TextBox 9">
+            <a:extLst>
+              <a:ext uri="{FF2B5EF4-FFF2-40B4-BE49-F238E27FC236}">
+                <a16:creationId xmlns:a16="http://schemas.microsoft.com/office/drawing/2014/main" id="{E6326E1C-B678-FB52-20DB-E59938A94723}"/>
+              </a:ext>
+            </a:extLst>
+          </p:cNvPr>
+          <p:cNvSpPr txBox="1"/>
+          <p:nvPr/>
+        </p:nvSpPr>
+        <p:spPr>
+          <a:xfrm>
+            <a:off x="589935" y="186813"/>
+            <a:ext cx="11149781" cy="584775"/>
+          </a:xfrm>
+          <a:prstGeom prst="rect">
+            <a:avLst/>
+          </a:prstGeom>
+          <a:noFill/>
+        </p:spPr>
+        <p:txBody>
+          <a:bodyPr wrap="square" rtlCol="0">
+            <a:spAutoFit/>
           </a:bodyPr>
           <a:lstStyle/>
           <a:p>
             <a:r>
-              <a:rPr lang="en-US" sz="6000" b="1" dirty="0">
+              <a:rPr lang="en-US" sz="3200" b="1" dirty="0" err="1">
                 <a:latin typeface="Arial Black" panose="020B0A04020102020204" pitchFamily="34" charset="0"/>
               </a:rPr>
-              <a:t>Conclusion</a:t>
-            </a:r>
-          </a:p>
-        </p:txBody>
-      </p:sp>
-      <p:sp>
-        <p:nvSpPr>
-          <p:cNvPr id="3" name="Content Placeholder 2">
-            <a:extLst>
-              <a:ext uri="{FF2B5EF4-FFF2-40B4-BE49-F238E27FC236}">
-                <a16:creationId xmlns:a16="http://schemas.microsoft.com/office/drawing/2014/main" id="{9DA73E89-7C4C-6A45-493C-D37264163A34}"/>
-              </a:ext>
-            </a:extLst>
-          </p:cNvPr>
-          <p:cNvSpPr>
-            <a:spLocks noGrp="1"/>
-          </p:cNvSpPr>
-          <p:nvPr>
-            <p:ph idx="1"/>
-          </p:nvPr>
-        </p:nvSpPr>
-        <p:spPr/>
-        <p:txBody>
-          <a:bodyPr>
-            <a:normAutofit/>
-          </a:bodyPr>
-          <a:lstStyle/>
-          <a:p>
-            <a:r>
-              <a:rPr lang="en-US" sz="3600" dirty="0">
-                <a:latin typeface="Arial" panose="020B0604020202020204" pitchFamily="34" charset="0"/>
-                <a:cs typeface="Arial" panose="020B0604020202020204" pitchFamily="34" charset="0"/>
-              </a:rPr>
-              <a:t>CNN can effectively classify lung CT scan images.</a:t>
-            </a:r>
-          </a:p>
-          <a:p>
-            <a:r>
-              <a:rPr lang="en-US" sz="3600" dirty="0">
-                <a:latin typeface="Arial" panose="020B0604020202020204" pitchFamily="34" charset="0"/>
-                <a:cs typeface="Arial" panose="020B0604020202020204" pitchFamily="34" charset="0"/>
-              </a:rPr>
-              <a:t>The </a:t>
-            </a:r>
-            <a:r>
-              <a:rPr lang="en-US" sz="3600" dirty="0" err="1">
-                <a:latin typeface="Arial" panose="020B0604020202020204" pitchFamily="34" charset="0"/>
-                <a:cs typeface="Arial" panose="020B0604020202020204" pitchFamily="34" charset="0"/>
-              </a:rPr>
               <a:t>Streamlit</a:t>
             </a:r>
             <a:r>
-              <a:rPr lang="en-US" sz="3600" dirty="0">
-                <a:latin typeface="Arial" panose="020B0604020202020204" pitchFamily="34" charset="0"/>
-                <a:cs typeface="Arial" panose="020B0604020202020204" pitchFamily="34" charset="0"/>
-              </a:rPr>
-              <a:t> app gives an easy to use interface with real‑time predictions.</a:t>
-            </a:r>
-          </a:p>
-          <a:p>
-            <a:r>
-              <a:rPr lang="en-US" sz="3600" dirty="0">
-                <a:latin typeface="Arial" panose="020B0604020202020204" pitchFamily="34" charset="0"/>
-                <a:cs typeface="Arial" panose="020B0604020202020204" pitchFamily="34" charset="0"/>
-              </a:rPr>
-              <a:t>Future work: larger datasets can be used with improved architectures.</a:t>
-            </a:r>
-          </a:p>
-          <a:p>
-            <a:endParaRPr lang="en-US" sz="3600" dirty="0">
-              <a:latin typeface="Arial" panose="020B0604020202020204" pitchFamily="34" charset="0"/>
-              <a:cs typeface="Arial" panose="020B0604020202020204" pitchFamily="34" charset="0"/>
-            </a:endParaRPr>
+              <a:rPr lang="en-US" sz="3200" b="1" dirty="0">
+                <a:latin typeface="Arial Black" panose="020B0A04020102020204" pitchFamily="34" charset="0"/>
+              </a:rPr>
+              <a:t> App Screenshots and Prediction Graph</a:t>
+            </a:r>
           </a:p>
         </p:txBody>
       </p:sp>
     </p:spTree>
     <p:extLst>
       <p:ext uri="{BB962C8B-B14F-4D97-AF65-F5344CB8AC3E}">
-        <p14:creationId xmlns:p14="http://schemas.microsoft.com/office/powerpoint/2010/main" val="2753395072"/>
+        <p14:creationId xmlns:p14="http://schemas.microsoft.com/office/powerpoint/2010/main" val="1110243047"/>
       </p:ext>
     </p:extLst>
   </p:cSld>
